--- a/docs/Slides/4_testing.pptx
+++ b/docs/Slides/4_testing.pptx
@@ -112,7 +112,33 @@
       </a:defRPr>
     </a:lvl9pPr>
   </p:defaultTextStyle>
+  <p:extLst>
+    <p:ext uri="{EFAFB233-063F-42B5-8137-9DF3F51BA10A}">
+      <p15:sldGuideLst xmlns:p15="http://schemas.microsoft.com/office/powerpoint/2012/main"/>
+    </p:ext>
+  </p:extLst>
 </p:presentation>
+</file>
+
+<file path=ppt/changesInfos/changesInfo1.xml><?xml version="1.0" encoding="utf-8"?>
+<pc:chgInfo xmlns:a="http://schemas.openxmlformats.org/drawingml/2006/main" xmlns:r="http://schemas.openxmlformats.org/officeDocument/2006/relationships" xmlns:ac="http://schemas.microsoft.com/office/drawing/2013/main/command" xmlns:pc="http://schemas.microsoft.com/office/powerpoint/2013/main/command">
+  <pc:docChgLst>
+    <pc:chgData name="Finley Griffin" userId="22b0b6c4-ce40-4dd6-a0c2-f0f65dd91442" providerId="ADAL" clId="{E340F9FE-63CF-5DC1-BB85-0501F5A6B451}"/>
+    <pc:docChg chg="modSld">
+      <pc:chgData name="Finley Griffin" userId="22b0b6c4-ce40-4dd6-a0c2-f0f65dd91442" providerId="ADAL" clId="{E340F9FE-63CF-5DC1-BB85-0501F5A6B451}" dt="2026-03-09T17:13:17.856" v="43" actId="20577"/>
+      <pc:docMkLst>
+        <pc:docMk/>
+      </pc:docMkLst>
+      <pc:sldChg chg="modNotesTx">
+        <pc:chgData name="Finley Griffin" userId="22b0b6c4-ce40-4dd6-a0c2-f0f65dd91442" providerId="ADAL" clId="{E340F9FE-63CF-5DC1-BB85-0501F5A6B451}" dt="2026-03-09T17:13:17.856" v="43" actId="20577"/>
+        <pc:sldMkLst>
+          <pc:docMk/>
+          <pc:sldMk cId="1795549146" sldId="347"/>
+        </pc:sldMkLst>
+      </pc:sldChg>
+    </pc:docChg>
+  </pc:docChgLst>
+</pc:chgInfo>
 </file>
 
 <file path=ppt/notesMasters/notesMaster1.xml><?xml version="1.0" encoding="utf-8"?>
@@ -197,7 +223,7 @@
           <a:p>
             <a:fld id="{A702E44F-959D-364B-A5A1-526245429FE3}" type="datetimeFigureOut">
               <a:rPr lang="en-US" smtClean="0"/>
-              <a:t>4/29/24</a:t>
+              <a:t>3/9/26</a:t>
             </a:fld>
             <a:endParaRPr lang="en-US"/>
           </a:p>
@@ -596,7 +622,10 @@
           <a:bodyPr/>
           <a:lstStyle/>
           <a:p>
-            <a:endParaRPr lang="en-US" dirty="0"/>
+            <a:r>
+              <a:rPr lang="en-US" dirty="0"/>
+              <a:t>Also mention integration tests</a:t>
+            </a:r>
           </a:p>
         </p:txBody>
       </p:sp>
@@ -785,7 +814,7 @@
           <a:p>
             <a:fld id="{A9B74B2A-1FB9-AA42-8D0D-8BA8D97E6B33}" type="datetimeFigureOut">
               <a:rPr lang="en-US" smtClean="0"/>
-              <a:t>4/29/24</a:t>
+              <a:t>3/9/26</a:t>
             </a:fld>
             <a:endParaRPr lang="en-US"/>
           </a:p>
@@ -985,7 +1014,7 @@
           <a:p>
             <a:fld id="{A9B74B2A-1FB9-AA42-8D0D-8BA8D97E6B33}" type="datetimeFigureOut">
               <a:rPr lang="en-US" smtClean="0"/>
-              <a:t>4/29/24</a:t>
+              <a:t>3/9/26</a:t>
             </a:fld>
             <a:endParaRPr lang="en-US"/>
           </a:p>
@@ -1195,7 +1224,7 @@
           <a:p>
             <a:fld id="{A9B74B2A-1FB9-AA42-8D0D-8BA8D97E6B33}" type="datetimeFigureOut">
               <a:rPr lang="en-US" smtClean="0"/>
-              <a:t>4/29/24</a:t>
+              <a:t>3/9/26</a:t>
             </a:fld>
             <a:endParaRPr lang="en-US"/>
           </a:p>
@@ -2118,7 +2147,7 @@
           <a:p>
             <a:fld id="{A9B74B2A-1FB9-AA42-8D0D-8BA8D97E6B33}" type="datetimeFigureOut">
               <a:rPr lang="en-US" smtClean="0"/>
-              <a:t>4/29/24</a:t>
+              <a:t>3/9/26</a:t>
             </a:fld>
             <a:endParaRPr lang="en-US"/>
           </a:p>
@@ -2394,7 +2423,7 @@
           <a:p>
             <a:fld id="{A9B74B2A-1FB9-AA42-8D0D-8BA8D97E6B33}" type="datetimeFigureOut">
               <a:rPr lang="en-US" smtClean="0"/>
-              <a:t>4/29/24</a:t>
+              <a:t>3/9/26</a:t>
             </a:fld>
             <a:endParaRPr lang="en-US"/>
           </a:p>
@@ -2662,7 +2691,7 @@
           <a:p>
             <a:fld id="{A9B74B2A-1FB9-AA42-8D0D-8BA8D97E6B33}" type="datetimeFigureOut">
               <a:rPr lang="en-US" smtClean="0"/>
-              <a:t>4/29/24</a:t>
+              <a:t>3/9/26</a:t>
             </a:fld>
             <a:endParaRPr lang="en-US"/>
           </a:p>
@@ -3077,7 +3106,7 @@
           <a:p>
             <a:fld id="{A9B74B2A-1FB9-AA42-8D0D-8BA8D97E6B33}" type="datetimeFigureOut">
               <a:rPr lang="en-US" smtClean="0"/>
-              <a:t>4/29/24</a:t>
+              <a:t>3/9/26</a:t>
             </a:fld>
             <a:endParaRPr lang="en-US"/>
           </a:p>
@@ -3219,7 +3248,7 @@
           <a:p>
             <a:fld id="{A9B74B2A-1FB9-AA42-8D0D-8BA8D97E6B33}" type="datetimeFigureOut">
               <a:rPr lang="en-US" smtClean="0"/>
-              <a:t>4/29/24</a:t>
+              <a:t>3/9/26</a:t>
             </a:fld>
             <a:endParaRPr lang="en-US"/>
           </a:p>
@@ -3332,7 +3361,7 @@
           <a:p>
             <a:fld id="{A9B74B2A-1FB9-AA42-8D0D-8BA8D97E6B33}" type="datetimeFigureOut">
               <a:rPr lang="en-US" smtClean="0"/>
-              <a:t>4/29/24</a:t>
+              <a:t>3/9/26</a:t>
             </a:fld>
             <a:endParaRPr lang="en-US"/>
           </a:p>
@@ -3645,7 +3674,7 @@
           <a:p>
             <a:fld id="{A9B74B2A-1FB9-AA42-8D0D-8BA8D97E6B33}" type="datetimeFigureOut">
               <a:rPr lang="en-US" smtClean="0"/>
-              <a:t>4/29/24</a:t>
+              <a:t>3/9/26</a:t>
             </a:fld>
             <a:endParaRPr lang="en-US"/>
           </a:p>
@@ -3934,7 +3963,7 @@
           <a:p>
             <a:fld id="{A9B74B2A-1FB9-AA42-8D0D-8BA8D97E6B33}" type="datetimeFigureOut">
               <a:rPr lang="en-US" smtClean="0"/>
-              <a:t>4/29/24</a:t>
+              <a:t>3/9/26</a:t>
             </a:fld>
             <a:endParaRPr lang="en-US"/>
           </a:p>
@@ -4177,7 +4206,7 @@
           <a:p>
             <a:fld id="{A9B74B2A-1FB9-AA42-8D0D-8BA8D97E6B33}" type="datetimeFigureOut">
               <a:rPr lang="en-US" smtClean="0"/>
-              <a:t>4/29/24</a:t>
+              <a:t>3/9/26</a:t>
             </a:fld>
             <a:endParaRPr lang="en-US"/>
           </a:p>
